--- a/발표/트레빗_소개영상_발표.pptx
+++ b/발표/트레빗_소개영상_발표.pptx
@@ -6072,7 +6072,7 @@
                 <a:ea typeface="Arial" pitchFamily="34" charset="-122"/>
                 <a:cs typeface="Arial" pitchFamily="34" charset="-120"/>
               </a:rPr>
-              <a:t>아산스마트팩토리마이스터고등학교 (Kims &amp; Lee Team) </a:t>
+              <a:t>아산스마트팩토리마이스터고등학교 (PLAYLABS) </a:t>
             </a:r>
           </a:p>
           <a:p>
@@ -6103,7 +6103,7 @@
                 <a:ea typeface="Arial" pitchFamily="34" charset="-122"/>
                 <a:cs typeface="Arial" pitchFamily="34" charset="-120"/>
               </a:rPr>
-              <a:t>(대표) 김재원 김준서 </a:t>
+              <a:t>(대표) 장한결 이승주 </a:t>
             </a:r>
             <a:r>
               <a:rPr lang="en-US" sz="950" dirty="0" err="1">
@@ -9451,7 +9451,7 @@
                 <a:ea typeface="Arial" pitchFamily="34" charset="-122"/>
                 <a:cs typeface="Arial" pitchFamily="34" charset="-120"/>
               </a:rPr>
-              <a:t>김재원</a:t>
+              <a:t>장한결</a:t>
             </a:r>
             <a:endParaRPr lang="en-US" sz="1300" dirty="0"/>
           </a:p>
@@ -9603,7 +9603,7 @@
                 <a:ea typeface="Arial" pitchFamily="34" charset="-122"/>
                 <a:cs typeface="Arial" pitchFamily="34" charset="-120"/>
               </a:rPr>
-              <a:t>김준서</a:t>
+              <a:t>이승주</a:t>
             </a:r>
             <a:endParaRPr lang="en-US" sz="1300" dirty="0"/>
           </a:p>
@@ -10039,7 +10039,7 @@
                 <a:ea typeface="Arial" pitchFamily="34" charset="-122"/>
                 <a:cs typeface="Arial" pitchFamily="34" charset="-120"/>
               </a:rPr>
-              <a:t>Kims &amp; Lee Team</a:t>
+              <a:t>PLAYLABS</a:t>
             </a:r>
             <a:endParaRPr lang="en-US" sz="1400" dirty="0"/>
           </a:p>
@@ -10078,7 +10078,7 @@
                 <a:ea typeface="Arial" pitchFamily="34" charset="-122"/>
                 <a:cs typeface="Arial" pitchFamily="34" charset="-120"/>
               </a:rPr>
-              <a:t>아산스마트팩토리마이스터고등학교  ·  김태훈(대표) 김재원 김준서 이윤호  ·  지도교사 김영우</a:t>
+              <a:t>아산스마트팩토리마이스터고등학교  ·  김태훈(대표) 장한결 이승주 이윤호  ·  지도교사 김영우</a:t>
             </a:r>
             <a:endParaRPr lang="en-US" sz="1100" dirty="0"/>
           </a:p>
